--- a/TuStockApp_Presentacion_Pitch.pptx
+++ b/TuStockApp_Presentacion_Pitch.pptx
@@ -11,6 +11,7 @@
     <p:sldId id="259" r:id="rId5"/>
     <p:sldId id="266" r:id="rId17"/>
     <p:sldId id="267" r:id="rId18"/>
+    <p:sldId id="269" r:id="rId20"/>
     <p:sldId id="260" r:id="rId6"/>
     <p:sldId id="261" r:id="rId7"/>
     <p:sldId id="262" r:id="rId8"/>
@@ -3114,6 +3115,277 @@
                 <a:cs typeface="Calibri" pitchFamily="34" charset="-120"/>
               </a:rPr>
               <a:t>de acompañamiento incluido</a:t>
+            </a:r>
+            <a:endParaRPr lang="en-US" sz="1300" dirty="0"/>
+          </a:p>
+        </p:txBody>
+      </p:sp>
+    </p:spTree>
+  </p:cSld>
+  <p:clrMapOvr>
+    <a:masterClrMapping/>
+  </p:clrMapOvr>
+</p:sld>
+</file>
+
+<file path=ppt/slides/slide14.xml><?xml version="1.0" encoding="utf-8"?>
+<p:sld xmlns:a="http://schemas.openxmlformats.org/drawingml/2006/main" xmlns:r="http://schemas.openxmlformats.org/officeDocument/2006/relationships" xmlns:p="http://schemas.openxmlformats.org/presentationml/2006/main">
+  <p:cSld name="Slide 14">
+    <p:bg>
+      <p:bgPr>
+        <a:solidFill>
+          <a:srgbClr val="E8F5F3"/>
+        </a:solidFill>
+      </p:bgPr>
+    </p:bg>
+    <p:spTree>
+      <p:nvGrpSpPr>
+        <p:cNvPr id="1" name=""/>
+        <p:cNvGrpSpPr/>
+        <p:nvPr/>
+      </p:nvGrpSpPr>
+      <p:grpSpPr>
+        <a:xfrm>
+          <a:off x="0" y="0"/>
+          <a:ext cx="0" cy="0"/>
+          <a:chOff x="0" y="0"/>
+          <a:chExt cx="0" cy="0"/>
+        </a:xfrm>
+      </p:grpSpPr>
+      <p:sp>
+        <p:nvSpPr>
+          <p:cNvPr id="2" name="Text 0"/>
+          <p:cNvSpPr/>
+          <p:nvPr/>
+        </p:nvSpPr>
+        <p:spPr>
+          <a:xfrm>
+            <a:off x="548640" y="502920"/>
+            <a:ext cx="11094415" cy="822960"/>
+          </a:xfrm>
+          <a:prstGeom prst="rect">
+            <a:avLst/>
+          </a:prstGeom>
+          <a:noFill/>
+          <a:ln/>
+        </p:spPr>
+        <p:txBody>
+          <a:bodyPr wrap="square" lIns="0" tIns="0" rIns="0" bIns="0" rtlCol="0" anchor="ctr"/>
+          <a:lstStyle/>
+          <a:p>
+            <a:pPr algn="l" indent="0" marL="0">
+              <a:buNone/>
+            </a:pPr>
+            <a:r>
+              <a:rPr lang="en-US" sz="3000" b="1" dirty="0">
+                <a:solidFill>
+                  <a:srgbClr val="028090"/>
+                </a:solidFill>
+                <a:latin typeface="Cambria" pitchFamily="34" charset="0"/>
+                <a:ea typeface="Cambria" pitchFamily="34" charset="-122"/>
+                <a:cs typeface="Cambria" pitchFamily="34" charset="-120"/>
+              </a:rPr>
+              <a:t>Promociones que avisan solas</a:t>
+            </a:r>
+            <a:endParaRPr lang="en-US" sz="3000" dirty="0"/>
+          </a:p>
+        </p:txBody>
+      </p:sp>
+      <p:sp>
+        <p:nvSpPr>
+          <p:cNvPr id="3" name="Text 1"/>
+          <p:cNvSpPr/>
+          <p:nvPr/>
+        </p:nvSpPr>
+        <p:spPr>
+          <a:xfrm>
+            <a:off x="548640" y="1828800"/>
+            <a:ext cx="6583680" cy="1828800"/>
+          </a:xfrm>
+          <a:prstGeom prst="rect">
+            <a:avLst/>
+          </a:prstGeom>
+          <a:noFill/>
+          <a:ln/>
+        </p:spPr>
+        <p:txBody>
+          <a:bodyPr wrap="square" lIns="0" tIns="0" rIns="0" bIns="0" rtlCol="0" anchor="ctr"/>
+          <a:lstStyle/>
+          <a:p>
+            <a:pPr indent="0" marL="0">
+              <a:buNone/>
+            </a:pPr>
+            <a:r>
+              <a:rPr lang="en-US" sz="2200" b="1" dirty="0">
+                <a:solidFill>
+                  <a:srgbClr val="13272B"/>
+                </a:solidFill>
+                <a:latin typeface="Calibri" pitchFamily="34" charset="0"/>
+                <a:ea typeface="Calibri" pitchFamily="34" charset="-122"/>
+                <a:cs typeface="Calibri" pitchFamily="34" charset="-120"/>
+              </a:rPr>
+              <a:t>Un regalo que te da la marca, un 2x1 puntual: activás la promoción en el producto y se muestra destacada en tu catálogo.</a:t>
+            </a:r>
+            <a:endParaRPr lang="en-US" sz="2200" dirty="0"/>
+          </a:p>
+        </p:txBody>
+      </p:sp>
+      <p:sp>
+        <p:nvSpPr>
+          <p:cNvPr id="4" name="Text 2"/>
+          <p:cNvSpPr/>
+          <p:nvPr/>
+        </p:nvSpPr>
+        <p:spPr>
+          <a:xfrm>
+            <a:off x="548640" y="3657600"/>
+            <a:ext cx="6400800" cy="548640"/>
+          </a:xfrm>
+          <a:prstGeom prst="rect">
+            <a:avLst/>
+          </a:prstGeom>
+          <a:noFill/>
+          <a:ln/>
+        </p:spPr>
+        <p:txBody>
+          <a:bodyPr wrap="square" lIns="0" tIns="0" rIns="0" bIns="0" rtlCol="0" anchor="ctr"/>
+          <a:lstStyle/>
+          <a:p>
+            <a:pPr indent="0" marL="0">
+              <a:buNone/>
+            </a:pPr>
+            <a:r>
+              <a:rPr lang="en-US" sz="1600" i="1" dirty="0">
+                <a:solidFill>
+                  <a:srgbClr val="4C6B70"/>
+                </a:solidFill>
+                <a:latin typeface="Calibri" pitchFamily="34" charset="0"/>
+                <a:ea typeface="Calibri" pitchFamily="34" charset="-122"/>
+                <a:cs typeface="Calibri" pitchFamily="34" charset="-120"/>
+              </a:rPr>
+              <a:t>Tus clientes reciben el aviso al celular en el momento, sin que vos les tengas que escribir uno por uno.</a:t>
+            </a:r>
+            <a:endParaRPr lang="en-US" sz="1600" dirty="0"/>
+          </a:p>
+        </p:txBody>
+      </p:sp>
+      <p:sp>
+        <p:nvSpPr>
+          <p:cNvPr id="5" name="Shape 3"/>
+          <p:cNvSpPr/>
+          <p:nvPr/>
+        </p:nvSpPr>
+        <p:spPr>
+          <a:xfrm>
+            <a:off x="8778240" y="1920240"/>
+            <a:ext cx="2377440" cy="2377440"/>
+          </a:xfrm>
+          <a:prstGeom prst="ellipse">
+            <a:avLst/>
+          </a:prstGeom>
+          <a:solidFill>
+            <a:srgbClr val="013A40"/>
+          </a:solidFill>
+          <a:ln/>
+        </p:spPr>
+      </p:sp>
+      <p:pic>
+        <p:nvPicPr>
+          <p:cNvPr id="6" name="Image 0" descr="preencoded.png">    </p:cNvPr>
+          <p:cNvPicPr>
+            <a:picLocks noChangeAspect="1"/>
+          </p:cNvPicPr>
+          <p:nvPr/>
+        </p:nvPicPr>
+        <p:blipFill>
+          <a:blip r:embed="rId1"/>
+          <a:stretch>
+            <a:fillRect/>
+          </a:stretch>
+        </p:blipFill>
+        <p:spPr>
+          <a:xfrm>
+            <a:off x="9134856" y="2276856"/>
+            <a:ext cx="1664208" cy="1664208"/>
+          </a:xfrm>
+          <a:prstGeom prst="rect">
+            <a:avLst/>
+          </a:prstGeom>
+        </p:spPr>
+      </p:pic>
+      <p:sp>
+        <p:nvSpPr>
+          <p:cNvPr id="7" name="Text 4"/>
+          <p:cNvSpPr/>
+          <p:nvPr/>
+        </p:nvSpPr>
+        <p:spPr>
+          <a:xfrm>
+            <a:off x="8412480" y="4434840"/>
+            <a:ext cx="3108960" cy="640080"/>
+          </a:xfrm>
+          <a:prstGeom prst="rect">
+            <a:avLst/>
+          </a:prstGeom>
+          <a:noFill/>
+          <a:ln/>
+        </p:spPr>
+        <p:txBody>
+          <a:bodyPr wrap="square" lIns="0" tIns="0" rIns="0" bIns="0" rtlCol="0" anchor="ctr"/>
+          <a:lstStyle/>
+          <a:p>
+            <a:pPr algn="ctr" indent="0" marL="0">
+              <a:buNone/>
+            </a:pPr>
+            <a:r>
+              <a:rPr lang="en-US" sz="2400" b="1" dirty="0">
+                <a:solidFill>
+                  <a:srgbClr val="028090"/>
+                </a:solidFill>
+                <a:latin typeface="Cambria" pitchFamily="34" charset="0"/>
+                <a:ea typeface="Cambria" pitchFamily="34" charset="-122"/>
+                <a:cs typeface="Cambria" pitchFamily="34" charset="-120"/>
+              </a:rPr>
+              <a:t>Al instante</a:t>
+            </a:r>
+            <a:endParaRPr lang="en-US" sz="2400" dirty="0"/>
+          </a:p>
+        </p:txBody>
+      </p:sp>
+      <p:sp>
+        <p:nvSpPr>
+          <p:cNvPr id="8" name="Text 5"/>
+          <p:cNvSpPr/>
+          <p:nvPr/>
+        </p:nvSpPr>
+        <p:spPr>
+          <a:xfrm>
+            <a:off x="8412480" y="5029200"/>
+            <a:ext cx="3108960" cy="365760"/>
+          </a:xfrm>
+          <a:prstGeom prst="rect">
+            <a:avLst/>
+          </a:prstGeom>
+          <a:noFill/>
+          <a:ln/>
+        </p:spPr>
+        <p:txBody>
+          <a:bodyPr wrap="square" lIns="0" tIns="0" rIns="0" bIns="0" rtlCol="0" anchor="ctr"/>
+          <a:lstStyle/>
+          <a:p>
+            <a:pPr algn="ctr" indent="0" marL="0">
+              <a:buNone/>
+            </a:pPr>
+            <a:r>
+              <a:rPr lang="en-US" sz="1300" dirty="0">
+                <a:solidFill>
+                  <a:srgbClr val="4C6B70"/>
+                </a:solidFill>
+                <a:latin typeface="Calibri" pitchFamily="34" charset="0"/>
+                <a:ea typeface="Calibri" pitchFamily="34" charset="-122"/>
+                <a:cs typeface="Calibri" pitchFamily="34" charset="-120"/>
+              </a:rPr>
+              <a:t>se entera cada cliente</a:t>
             </a:r>
             <a:endParaRPr lang="en-US" sz="1300" dirty="0"/>
           </a:p>
